--- a/ragic-portal-exec-presentation_v2.pptx
+++ b/ragic-portal-exec-presentation_v2.pptx
@@ -127,7 +127,7 @@
 <file path=ppt/revisionInfo.xml><?xml version="1.0" encoding="utf-8"?>
 <p1510:revInfo xmlns:a="http://schemas.openxmlformats.org/drawingml/2006/main" xmlns:r="http://schemas.openxmlformats.org/officeDocument/2006/relationships" xmlns:p1510="http://schemas.microsoft.com/office/powerpoint/2015/10/main">
   <p1510:revLst>
-    <p1510:client id="{FCF38F98-BA64-4216-A92E-4FDEDDE00BF9}" v="35" dt="2026-05-08T06:22:18.940"/>
+    <p1510:client id="{FCF38F98-BA64-4216-A92E-4FDEDDE00BF9}" v="46" dt="2026-05-12T03:37:59.279"/>
   </p1510:revLst>
 </p1510:revInfo>
 </file>
@@ -137,7 +137,7 @@
   <pc:docChgLst>
     <pc:chgData name="Samuel Huang" userId="3d14d3036a2a384b" providerId="LiveId" clId="{59E6B3E9-767B-4360-86A1-1FE5E3B4620C}"/>
     <pc:docChg chg="undo custSel addSld delSld modSld sldOrd">
-      <pc:chgData name="Samuel Huang" userId="3d14d3036a2a384b" providerId="LiveId" clId="{59E6B3E9-767B-4360-86A1-1FE5E3B4620C}" dt="2026-05-08T06:22:18.939" v="179"/>
+      <pc:chgData name="Samuel Huang" userId="3d14d3036a2a384b" providerId="LiveId" clId="{59E6B3E9-767B-4360-86A1-1FE5E3B4620C}" dt="2026-05-12T03:38:01.625" v="227" actId="20577"/>
       <pc:docMkLst>
         <pc:docMk/>
       </pc:docMkLst>
@@ -179,38 +179,6 @@
             <ac:spMk id="9" creationId="{00000000-0000-0000-0000-000000000000}"/>
           </ac:spMkLst>
         </pc:spChg>
-        <pc:graphicFrameChg chg="add mod">
-          <ac:chgData name="Samuel Huang" userId="3d14d3036a2a384b" providerId="LiveId" clId="{59E6B3E9-767B-4360-86A1-1FE5E3B4620C}" dt="2026-05-07T23:27:38.888" v="14"/>
-          <ac:graphicFrameMkLst>
-            <pc:docMk/>
-            <pc:sldMk cId="0" sldId="256"/>
-            <ac:graphicFrameMk id="10" creationId="{887F7988-9E8F-BCB5-83C6-7CA9F9494699}"/>
-          </ac:graphicFrameMkLst>
-        </pc:graphicFrameChg>
-        <pc:graphicFrameChg chg="add mod">
-          <ac:chgData name="Samuel Huang" userId="3d14d3036a2a384b" providerId="LiveId" clId="{59E6B3E9-767B-4360-86A1-1FE5E3B4620C}" dt="2026-05-07T23:27:38.888" v="14"/>
-          <ac:graphicFrameMkLst>
-            <pc:docMk/>
-            <pc:sldMk cId="0" sldId="256"/>
-            <ac:graphicFrameMk id="11" creationId="{25994EB7-047F-6E51-8CA4-B7ED505E97CC}"/>
-          </ac:graphicFrameMkLst>
-        </pc:graphicFrameChg>
-        <pc:graphicFrameChg chg="add del mod">
-          <ac:chgData name="Samuel Huang" userId="3d14d3036a2a384b" providerId="LiveId" clId="{59E6B3E9-767B-4360-86A1-1FE5E3B4620C}" dt="2026-05-07T23:28:16.535" v="19" actId="478"/>
-          <ac:graphicFrameMkLst>
-            <pc:docMk/>
-            <pc:sldMk cId="0" sldId="256"/>
-            <ac:graphicFrameMk id="12" creationId="{3DB958D2-8D04-8318-7DE7-C63E1E64ACF7}"/>
-          </ac:graphicFrameMkLst>
-        </pc:graphicFrameChg>
-        <pc:graphicFrameChg chg="add del mod">
-          <ac:chgData name="Samuel Huang" userId="3d14d3036a2a384b" providerId="LiveId" clId="{59E6B3E9-767B-4360-86A1-1FE5E3B4620C}" dt="2026-05-07T23:28:11.826" v="18" actId="478"/>
-          <ac:graphicFrameMkLst>
-            <pc:docMk/>
-            <pc:sldMk cId="0" sldId="256"/>
-            <ac:graphicFrameMk id="13" creationId="{01318831-34C9-AF99-BEB6-7705CB3C5E5D}"/>
-          </ac:graphicFrameMkLst>
-        </pc:graphicFrameChg>
       </pc:sldChg>
       <pc:sldChg chg="mod modShow">
         <pc:chgData name="Samuel Huang" userId="3d14d3036a2a384b" providerId="LiveId" clId="{59E6B3E9-767B-4360-86A1-1FE5E3B4620C}" dt="2026-05-08T00:50:54.600" v="120" actId="729"/>
@@ -545,21 +513,6 @@
             <ac:spMk id="11" creationId="{00000000-0000-0000-0000-000000000000}"/>
           </ac:spMkLst>
         </pc:spChg>
-        <pc:spChg chg="add del">
-          <ac:chgData name="Samuel Huang" userId="3d14d3036a2a384b" providerId="LiveId" clId="{59E6B3E9-767B-4360-86A1-1FE5E3B4620C}" dt="2026-05-07T23:32:20.997" v="62" actId="22"/>
-          <ac:spMkLst>
-            <pc:docMk/>
-            <pc:sldMk cId="0" sldId="266"/>
-            <ac:spMk id="13" creationId="{2531A2DE-11A8-219D-E6A0-5F4B065532BE}"/>
-          </ac:spMkLst>
-        </pc:spChg>
-      </pc:sldChg>
-      <pc:sldChg chg="add del setBg">
-        <pc:chgData name="Samuel Huang" userId="3d14d3036a2a384b" providerId="LiveId" clId="{59E6B3E9-767B-4360-86A1-1FE5E3B4620C}" dt="2026-05-07T23:32:33.853" v="64"/>
-        <pc:sldMkLst>
-          <pc:docMk/>
-          <pc:sldMk cId="2743607969" sldId="267"/>
-        </pc:sldMkLst>
       </pc:sldChg>
       <pc:sldChg chg="modSp add mod ord modShow">
         <pc:chgData name="Samuel Huang" userId="3d14d3036a2a384b" providerId="LiveId" clId="{59E6B3E9-767B-4360-86A1-1FE5E3B4620C}" dt="2026-05-08T00:52:00.542" v="136"/>
@@ -584,8 +537,8 @@
           </ac:spMkLst>
         </pc:spChg>
       </pc:sldChg>
-      <pc:sldChg chg="modSp add mod setBg">
-        <pc:chgData name="Samuel Huang" userId="3d14d3036a2a384b" providerId="LiveId" clId="{59E6B3E9-767B-4360-86A1-1FE5E3B4620C}" dt="2026-05-08T06:22:11.743" v="177"/>
+      <pc:sldChg chg="modSp add mod setBg modNotesTx">
+        <pc:chgData name="Samuel Huang" userId="3d14d3036a2a384b" providerId="LiveId" clId="{59E6B3E9-767B-4360-86A1-1FE5E3B4620C}" dt="2026-05-12T03:38:01.625" v="227" actId="20577"/>
         <pc:sldMkLst>
           <pc:docMk/>
           <pc:sldMk cId="0" sldId="268"/>
@@ -604,6 +557,14 @@
             <pc:docMk/>
             <pc:sldMk cId="0" sldId="268"/>
             <ac:spMk id="5" creationId="{00000000-0000-0000-0000-000000000000}"/>
+          </ac:spMkLst>
+        </pc:spChg>
+        <pc:spChg chg="mod">
+          <ac:chgData name="Samuel Huang" userId="3d14d3036a2a384b" providerId="LiveId" clId="{59E6B3E9-767B-4360-86A1-1FE5E3B4620C}" dt="2026-05-12T03:35:14.965" v="224" actId="5793"/>
+          <ac:spMkLst>
+            <pc:docMk/>
+            <pc:sldMk cId="0" sldId="268"/>
+            <ac:spMk id="25" creationId="{00000000-0000-0000-0000-000000000000}"/>
           </ac:spMkLst>
         </pc:spChg>
       </pc:sldChg>
@@ -1537,7 +1498,103 @@
           <a:bodyPr/>
           <a:lstStyle/>
           <a:p>
-            <a:endParaRPr lang="en-US" dirty="0"/>
+            <a:r>
+              <a:rPr lang="en-US" altLang="zh-TW"/>
+              <a:t>LEAN </a:t>
+            </a:r>
+            <a:r>
+              <a:rPr lang="zh-TW" altLang="en-US"/>
+              <a:t>管理不是單純節省成本，而是透過流程標準化、資料正確化與持續改善，讓組織用更少的浪費完成更多有價值的工作。</a:t>
+            </a:r>
+            <a:br>
+              <a:rPr lang="zh-TW" altLang="en-US"/>
+            </a:br>
+            <a:r>
+              <a:rPr lang="zh-TW" altLang="en-US"/>
+              <a:t>對企業來說，</a:t>
+            </a:r>
+            <a:r>
+              <a:rPr lang="en-US" altLang="zh-TW"/>
+              <a:t>LEAN </a:t>
+            </a:r>
+            <a:r>
+              <a:rPr lang="zh-TW" altLang="en-US"/>
+              <a:t>的重點是讓問題被看見、流程被改善、數據能決策、工作能標準化。</a:t>
+            </a:r>
+            <a:br>
+              <a:rPr lang="en-US" altLang="zh-TW"/>
+            </a:br>
+            <a:br>
+              <a:rPr lang="en-US" altLang="zh-TW"/>
+            </a:br>
+            <a:r>
+              <a:rPr lang="zh-TW" altLang="en-US" b="1"/>
+              <a:t>簡單結論</a:t>
+            </a:r>
+          </a:p>
+          <a:p>
+            <a:r>
+              <a:rPr lang="en-US" altLang="zh-TW" b="1"/>
+              <a:t>LEAN </a:t>
+            </a:r>
+            <a:r>
+              <a:rPr lang="zh-TW" altLang="en-US" b="1"/>
+              <a:t>管理的重點有四個：</a:t>
+            </a:r>
+            <a:endParaRPr lang="zh-TW" altLang="en-US"/>
+          </a:p>
+          <a:p>
+            <a:r>
+              <a:rPr lang="zh-TW" altLang="en-US" b="1"/>
+              <a:t>看見浪費</a:t>
+            </a:r>
+            <a:r>
+              <a:rPr lang="zh-TW" altLang="en-US"/>
+              <a:t> </a:t>
+            </a:r>
+          </a:p>
+          <a:p>
+            <a:r>
+              <a:rPr lang="zh-TW" altLang="en-US" b="1"/>
+              <a:t>改善流程</a:t>
+            </a:r>
+            <a:r>
+              <a:rPr lang="zh-TW" altLang="en-US"/>
+              <a:t> </a:t>
+            </a:r>
+          </a:p>
+          <a:p>
+            <a:r>
+              <a:rPr lang="zh-TW" altLang="en-US" b="1"/>
+              <a:t>標準化作業</a:t>
+            </a:r>
+            <a:r>
+              <a:rPr lang="zh-TW" altLang="en-US"/>
+              <a:t> </a:t>
+            </a:r>
+          </a:p>
+          <a:p>
+            <a:r>
+              <a:rPr lang="zh-TW" altLang="en-US" b="1"/>
+              <a:t>用數據持續優化</a:t>
+            </a:r>
+            <a:r>
+              <a:rPr lang="zh-TW" altLang="en-US"/>
+              <a:t> </a:t>
+            </a:r>
+          </a:p>
+          <a:p>
+            <a:r>
+              <a:rPr lang="zh-TW" altLang="en-US"/>
+              <a:t>套用在系統開發與營運管理上，就是：</a:t>
+            </a:r>
+          </a:p>
+          <a:p>
+            <a:r>
+              <a:rPr lang="zh-TW" altLang="en-US" b="1"/>
+              <a:t>把混亂的流程變清楚，把重複的工作自動化，把錯誤的資料修正，把主管需要的資訊即時呈現。</a:t>
+            </a:r>
+            <a:endParaRPr lang="zh-TW" altLang="en-US"/>
           </a:p>
         </p:txBody>
       </p:sp>
@@ -15138,11 +15195,8 @@
           <a:bodyPr wrap="square" lIns="0" tIns="0" rIns="0" bIns="0" rtlCol="0" anchor="t"/>
           <a:lstStyle/>
           <a:p>
-            <a:pPr marL="0" indent="0">
-              <a:buNone/>
-            </a:pPr>
-            <a:r>
-              <a:rPr lang="en-US" sz="1300" b="1" dirty="0">
+            <a:r>
+              <a:rPr lang="en-US" sz="1300" b="1">
                 <a:solidFill>
                   <a:srgbClr val="1B3A5C"/>
                 </a:solidFill>
@@ -15151,6 +15205,48 @@
                 <a:cs typeface="Arial Black" pitchFamily="34" charset="-120"/>
               </a:rPr>
               <a:t>工項與檢查項目過多</a:t>
+            </a:r>
+            <a:r>
+              <a:rPr lang="en-US" altLang="zh-TW" sz="1300" b="1">
+                <a:solidFill>
+                  <a:srgbClr val="1B3A5C"/>
+                </a:solidFill>
+                <a:latin typeface="微軟正黑體" panose="020B0604030504040204" pitchFamily="34" charset="-120"/>
+                <a:ea typeface="微軟正黑體" panose="020B0604030504040204" pitchFamily="34" charset="-120"/>
+                <a:cs typeface="Arial Black" pitchFamily="34" charset="-120"/>
+              </a:rPr>
+              <a:t>(</a:t>
+            </a:r>
+            <a:r>
+              <a:rPr lang="en-US" altLang="zh-TW" sz="1300" b="1">
+                <a:solidFill>
+                  <a:srgbClr val="1B3A5C"/>
+                </a:solidFill>
+                <a:latin typeface="微軟正黑體" panose="020B0604030504040204" pitchFamily="34" charset="-120"/>
+                <a:ea typeface="微軟正黑體" panose="020B0604030504040204" pitchFamily="34" charset="-120"/>
+              </a:rPr>
+              <a:t>LEAN –</a:t>
+            </a:r>
+            <a:r>
+              <a:rPr lang="zh-TW" altLang="en-US" sz="1300" b="1">
+                <a:solidFill>
+                  <a:srgbClr val="1B3A5C"/>
+                </a:solidFill>
+                <a:latin typeface="微軟正黑體" panose="020B0604030504040204" pitchFamily="34" charset="-120"/>
+                <a:ea typeface="微軟正黑體" panose="020B0604030504040204" pitchFamily="34" charset="-120"/>
+              </a:rPr>
+              <a:t> 精實管理</a:t>
+            </a:r>
+            <a:r>
+              <a:rPr lang="en-US" altLang="zh-TW" sz="1300" b="1">
+                <a:solidFill>
+                  <a:srgbClr val="1B3A5C"/>
+                </a:solidFill>
+                <a:latin typeface="微軟正黑體" panose="020B0604030504040204" pitchFamily="34" charset="-120"/>
+                <a:ea typeface="微軟正黑體" panose="020B0604030504040204" pitchFamily="34" charset="-120"/>
+                <a:cs typeface="Arial Black" pitchFamily="34" charset="-120"/>
+              </a:rPr>
+              <a:t>)</a:t>
             </a:r>
             <a:endParaRPr lang="en-US" sz="1300" dirty="0"/>
           </a:p>

--- a/ragic-portal-exec-presentation_v2.pptx
+++ b/ragic-portal-exec-presentation_v2.pptx
@@ -127,7 +127,7 @@
 <file path=ppt/revisionInfo.xml><?xml version="1.0" encoding="utf-8"?>
 <p1510:revInfo xmlns:a="http://schemas.openxmlformats.org/drawingml/2006/main" xmlns:r="http://schemas.openxmlformats.org/officeDocument/2006/relationships" xmlns:p1510="http://schemas.microsoft.com/office/powerpoint/2015/10/main">
   <p1510:revLst>
-    <p1510:client id="{FCF38F98-BA64-4216-A92E-4FDEDDE00BF9}" v="46" dt="2026-05-12T03:37:59.279"/>
+    <p1510:client id="{FCF38F98-BA64-4216-A92E-4FDEDDE00BF9}" v="49" dt="2026-05-13T05:26:01.390"/>
   </p1510:revLst>
 </p1510:revInfo>
 </file>
@@ -137,12 +137,12 @@
   <pc:docChgLst>
     <pc:chgData name="Samuel Huang" userId="3d14d3036a2a384b" providerId="LiveId" clId="{59E6B3E9-767B-4360-86A1-1FE5E3B4620C}"/>
     <pc:docChg chg="undo custSel addSld delSld modSld sldOrd">
-      <pc:chgData name="Samuel Huang" userId="3d14d3036a2a384b" providerId="LiveId" clId="{59E6B3E9-767B-4360-86A1-1FE5E3B4620C}" dt="2026-05-12T03:38:01.625" v="227" actId="20577"/>
+      <pc:chgData name="Samuel Huang" userId="3d14d3036a2a384b" providerId="LiveId" clId="{59E6B3E9-767B-4360-86A1-1FE5E3B4620C}" dt="2026-05-13T05:26:15.467" v="254" actId="1076"/>
       <pc:docMkLst>
         <pc:docMk/>
       </pc:docMkLst>
       <pc:sldChg chg="addSp delSp modSp mod">
-        <pc:chgData name="Samuel Huang" userId="3d14d3036a2a384b" providerId="LiveId" clId="{59E6B3E9-767B-4360-86A1-1FE5E3B4620C}" dt="2026-05-07T23:29:04.067" v="29" actId="20577"/>
+        <pc:chgData name="Samuel Huang" userId="3d14d3036a2a384b" providerId="LiveId" clId="{59E6B3E9-767B-4360-86A1-1FE5E3B4620C}" dt="2026-05-13T05:26:15.467" v="254" actId="1076"/>
         <pc:sldMkLst>
           <pc:docMk/>
           <pc:sldMk cId="0" sldId="256"/>
@@ -172,11 +172,19 @@
           </ac:spMkLst>
         </pc:spChg>
         <pc:spChg chg="mod">
-          <ac:chgData name="Samuel Huang" userId="3d14d3036a2a384b" providerId="LiveId" clId="{59E6B3E9-767B-4360-86A1-1FE5E3B4620C}" dt="2026-05-07T23:29:04.067" v="29" actId="20577"/>
+          <ac:chgData name="Samuel Huang" userId="3d14d3036a2a384b" providerId="LiveId" clId="{59E6B3E9-767B-4360-86A1-1FE5E3B4620C}" dt="2026-05-13T05:22:03.442" v="229" actId="20577"/>
           <ac:spMkLst>
             <pc:docMk/>
             <pc:sldMk cId="0" sldId="256"/>
             <ac:spMk id="9" creationId="{00000000-0000-0000-0000-000000000000}"/>
+          </ac:spMkLst>
+        </pc:spChg>
+        <pc:spChg chg="add mod">
+          <ac:chgData name="Samuel Huang" userId="3d14d3036a2a384b" providerId="LiveId" clId="{59E6B3E9-767B-4360-86A1-1FE5E3B4620C}" dt="2026-05-13T05:26:15.467" v="254" actId="1076"/>
+          <ac:spMkLst>
+            <pc:docMk/>
+            <pc:sldMk cId="0" sldId="256"/>
+            <ac:spMk id="10" creationId="{7E337924-9F8A-28D2-30D4-8826249116BD}"/>
           </ac:spMkLst>
         </pc:spChg>
       </pc:sldChg>
@@ -2588,7 +2596,7 @@
               <a:buNone/>
             </a:pPr>
             <a:r>
-              <a:rPr lang="en-US" sz="1400" dirty="0">
+              <a:rPr lang="en-US" sz="1400">
                 <a:solidFill>
                   <a:srgbClr val="CBD5E1"/>
                 </a:solidFill>
@@ -2596,10 +2604,10 @@
                 <a:ea typeface="Calibri" pitchFamily="34" charset="-122"/>
                 <a:cs typeface="Calibri" pitchFamily="34" charset="-120"/>
               </a:rPr>
-              <a:t>v1.57  ｜  飯店 </a:t>
-            </a:r>
-            <a:r>
-              <a:rPr lang="en-US" sz="1400">
+              <a:t>v1.59  </a:t>
+            </a:r>
+            <a:r>
+              <a:rPr lang="en-US" sz="1400" dirty="0">
                 <a:solidFill>
                   <a:srgbClr val="CBD5E1"/>
                 </a:solidFill>
@@ -2607,10 +2615,10 @@
                 <a:ea typeface="Calibri" pitchFamily="34" charset="-122"/>
                 <a:cs typeface="Calibri" pitchFamily="34" charset="-120"/>
               </a:rPr>
-              <a:t>× 商場  </a:t>
-            </a:r>
-            <a:r>
-              <a:rPr lang="en-US" sz="1400" dirty="0">
+              <a:t>｜  飯店 </a:t>
+            </a:r>
+            <a:r>
+              <a:rPr lang="en-US" sz="1400">
                 <a:solidFill>
                   <a:srgbClr val="CBD5E1"/>
                 </a:solidFill>
@@ -2618,9 +2626,65 @@
                 <a:ea typeface="Calibri" pitchFamily="34" charset="-122"/>
                 <a:cs typeface="Calibri" pitchFamily="34" charset="-120"/>
               </a:rPr>
+              <a:t>× 商場  </a:t>
+            </a:r>
+            <a:r>
+              <a:rPr lang="en-US" sz="1400" dirty="0">
+                <a:solidFill>
+                  <a:srgbClr val="CBD5E1"/>
+                </a:solidFill>
+                <a:latin typeface="Calibri" pitchFamily="34" charset="0"/>
+                <a:ea typeface="Calibri" pitchFamily="34" charset="-122"/>
+                <a:cs typeface="Calibri" pitchFamily="34" charset="-120"/>
+              </a:rPr>
               <a:t>｜  10+ 模組  ｜  30 分鐘自動同步</a:t>
             </a:r>
             <a:endParaRPr lang="en-US" sz="1400" dirty="0"/>
+          </a:p>
+        </p:txBody>
+      </p:sp>
+      <p:sp>
+        <p:nvSpPr>
+          <p:cNvPr id="10" name="Text 7">
+            <a:extLst>
+              <a:ext uri="{FF2B5EF4-FFF2-40B4-BE49-F238E27FC236}">
+                <a16:creationId xmlns:a16="http://schemas.microsoft.com/office/drawing/2014/main" id="{7E337924-9F8A-28D2-30D4-8826249116BD}"/>
+              </a:ext>
+            </a:extLst>
+          </p:cNvPr>
+          <p:cNvSpPr/>
+          <p:nvPr/>
+        </p:nvSpPr>
+        <p:spPr>
+          <a:xfrm>
+            <a:off x="4863882" y="4663440"/>
+            <a:ext cx="1719798" cy="411480"/>
+          </a:xfrm>
+          <a:prstGeom prst="rect">
+            <a:avLst/>
+          </a:prstGeom>
+          <a:noFill/>
+          <a:ln/>
+        </p:spPr>
+        <p:txBody>
+          <a:bodyPr wrap="square" lIns="0" tIns="0" rIns="0" bIns="0" rtlCol="0" anchor="ctr"/>
+          <a:lstStyle/>
+          <a:p>
+            <a:pPr marL="0" indent="0" algn="l">
+              <a:buNone/>
+            </a:pPr>
+            <a:r>
+              <a:rPr lang="en-US" altLang="zh-TW" sz="2000">
+                <a:solidFill>
+                  <a:srgbClr val="CBD5E1"/>
+                </a:solidFill>
+                <a:latin typeface="Calibri" pitchFamily="34" charset="0"/>
+                <a:ea typeface="Calibri" pitchFamily="34" charset="-122"/>
+                <a:cs typeface="Calibri" pitchFamily="34" charset="-120"/>
+              </a:rPr>
+              <a:t>Samuel Huang</a:t>
+            </a:r>
+            <a:endParaRPr lang="en-US" sz="2000" dirty="0"/>
           </a:p>
         </p:txBody>
       </p:sp>
